--- a/GroundTruth/GridBaselineReasoning_GroundTruthA.pptx
+++ b/GroundTruth/GridBaselineReasoning_GroundTruthA.pptx
@@ -133,6 +133,18 @@
   <c:style val="2"/>
   <c:chart>
     <c:title>
+      <c:tx>
+        <c:rich>
+          <a:bodyPr/>
+          <a:lstStyle/>
+          <a:p>
+            <a:r>
+              <a:rPr lang="en-US"/>
+              <a:t>Revenue</a:t>
+            </a:r>
+          </a:p>
+        </c:rich>
+      </c:tx>
       <c:overlay val="0"/>
     </c:title>
     <c:autoTitleDeleted val="0"/>
@@ -3496,7 +3508,7 @@
           </p:nvPr>
         </p:nvGraphicFramePr>
         <p:xfrm>
-          <a:off x="457200" y="2438399"/>
+          <a:off x="457200" y="3401568"/>
           <a:ext cx="3295650" cy="1463040"/>
         </p:xfrm>
         <a:graphic>
